--- a/media/resources/EkiOrunduuOnduktar/EkiOrunduuOnuktarSandykTabyshmak.pptx
+++ b/media/resources/EkiOrunduuOnduktar/EkiOrunduuOnuktarSandykTabyshmak.pptx
@@ -4990,7 +4990,7 @@
             </a:pPr>
             <a:r>
               <a:rPr lang="ru-RU" dirty="0"/>
-              <a:t>Турдуу пикирлер учун ыраазычылык билдиребиз.</a:t>
+              <a:t>Турдуу пикирлер үчүн ыраазычылык билдиребиз.</a:t>
             </a:r>
           </a:p>
           <a:p>
@@ -7118,21 +7118,21 @@
             <a:pPr algn="r"/>
             <a:r>
               <a:rPr lang="en-GB" sz="2800" dirty="0"/>
-              <a:t>1.59</a:t>
+              <a:t>1,59</a:t>
             </a:r>
           </a:p>
           <a:p>
             <a:pPr algn="r"/>
             <a:r>
               <a:rPr lang="en-GB" sz="2800" dirty="0"/>
-              <a:t>− 0.86</a:t>
+              <a:t>− 0,86</a:t>
             </a:r>
           </a:p>
           <a:p>
             <a:pPr algn="r"/>
             <a:r>
               <a:rPr lang="en-GB" sz="2800" dirty="0"/>
-              <a:t>= 0.73</a:t>
+              <a:t>= 0,73</a:t>
             </a:r>
             <a:endParaRPr lang="en-GB" dirty="0"/>
           </a:p>
@@ -7169,21 +7169,21 @@
             <a:pPr algn="r"/>
             <a:r>
               <a:rPr lang="en-GB" sz="2800" dirty="0"/>
-              <a:t>4.29</a:t>
+              <a:t>4,29</a:t>
             </a:r>
           </a:p>
           <a:p>
             <a:pPr algn="r"/>
             <a:r>
               <a:rPr lang="en-GB" sz="2800" dirty="0"/>
-              <a:t>− 0.58</a:t>
+              <a:t>− 0,58</a:t>
             </a:r>
           </a:p>
           <a:p>
             <a:pPr algn="r"/>
             <a:r>
               <a:rPr lang="en-GB" sz="2800" dirty="0"/>
-              <a:t>= 3.71</a:t>
+              <a:t>= 3,71</a:t>
             </a:r>
             <a:endParaRPr lang="en-GB" dirty="0"/>
           </a:p>
@@ -7220,21 +7220,21 @@
             <a:pPr algn="r"/>
             <a:r>
               <a:rPr lang="en-GB" sz="2800" dirty="0"/>
-              <a:t>3.47</a:t>
+              <a:t>3,47</a:t>
             </a:r>
           </a:p>
           <a:p>
             <a:pPr algn="r"/>
             <a:r>
               <a:rPr lang="en-GB" sz="2800" dirty="0"/>
-              <a:t>− 0.56</a:t>
+              <a:t>− 0,56</a:t>
             </a:r>
           </a:p>
           <a:p>
             <a:pPr algn="r"/>
             <a:r>
               <a:rPr lang="en-GB" sz="2800" dirty="0"/>
-              <a:t>= 2.91</a:t>
+              <a:t>= 2,91</a:t>
             </a:r>
             <a:endParaRPr lang="en-GB" dirty="0"/>
           </a:p>
@@ -8980,21 +8980,21 @@
             <a:pPr algn="r"/>
             <a:r>
               <a:rPr lang="en-GB" sz="2800" dirty="0"/>
-              <a:t>5.89</a:t>
+              <a:t>5,89</a:t>
             </a:r>
           </a:p>
           <a:p>
             <a:pPr algn="r"/>
             <a:r>
               <a:rPr lang="en-GB" sz="2800" dirty="0"/>
-              <a:t>+ 0.42</a:t>
+              <a:t>+ 0,42</a:t>
             </a:r>
           </a:p>
           <a:p>
             <a:pPr algn="r"/>
             <a:r>
               <a:rPr lang="en-GB" sz="2800" dirty="0"/>
-              <a:t>= 6.31</a:t>
+              <a:t>= 6,31</a:t>
             </a:r>
             <a:endParaRPr lang="en-GB" dirty="0"/>
           </a:p>
@@ -9031,21 +9031,21 @@
             <a:pPr algn="r"/>
             <a:r>
               <a:rPr lang="en-GB" sz="2800" dirty="0"/>
-              <a:t>8.54</a:t>
+              <a:t>8,54</a:t>
             </a:r>
           </a:p>
           <a:p>
             <a:pPr algn="r"/>
             <a:r>
               <a:rPr lang="en-GB" sz="2800" dirty="0"/>
-              <a:t>+ 0.63</a:t>
+              <a:t>+ 0,63</a:t>
             </a:r>
           </a:p>
           <a:p>
             <a:pPr algn="r"/>
             <a:r>
               <a:rPr lang="en-GB" sz="2800" dirty="0"/>
-              <a:t>= 9.17</a:t>
+              <a:t>= 9,17</a:t>
             </a:r>
             <a:endParaRPr lang="en-GB" dirty="0"/>
           </a:p>
@@ -9082,21 +9082,21 @@
             <a:pPr algn="r"/>
             <a:r>
               <a:rPr lang="en-GB" sz="2800" dirty="0"/>
-              <a:t>7.12</a:t>
+              <a:t>7,12</a:t>
             </a:r>
           </a:p>
           <a:p>
             <a:pPr algn="r"/>
             <a:r>
               <a:rPr lang="en-GB" sz="2800" dirty="0"/>
-              <a:t>+ 0.93</a:t>
+              <a:t>+ 0,93</a:t>
             </a:r>
           </a:p>
           <a:p>
             <a:pPr algn="r"/>
             <a:r>
               <a:rPr lang="en-GB" sz="2800" dirty="0"/>
-              <a:t>= 8.05</a:t>
+              <a:t>= 8,05</a:t>
             </a:r>
             <a:endParaRPr lang="en-GB" dirty="0"/>
           </a:p>
@@ -10742,21 +10742,21 @@
             <a:pPr algn="r"/>
             <a:r>
               <a:rPr lang="en-GB" sz="2800" dirty="0"/>
-              <a:t>5.89</a:t>
+              <a:t>5,89</a:t>
             </a:r>
           </a:p>
           <a:p>
             <a:pPr algn="r"/>
             <a:r>
               <a:rPr lang="en-GB" sz="2800" dirty="0"/>
-              <a:t>+ 0.42</a:t>
+              <a:t>+ 0,42</a:t>
             </a:r>
           </a:p>
           <a:p>
             <a:pPr algn="r"/>
             <a:r>
               <a:rPr lang="en-GB" sz="2800" dirty="0"/>
-              <a:t>= 6.31</a:t>
+              <a:t>= 6,31</a:t>
             </a:r>
             <a:endParaRPr lang="en-GB" dirty="0"/>
           </a:p>
@@ -10793,21 +10793,21 @@
             <a:pPr algn="r"/>
             <a:r>
               <a:rPr lang="en-GB" sz="2800" dirty="0"/>
-              <a:t>1.59</a:t>
+              <a:t>1,59</a:t>
             </a:r>
           </a:p>
           <a:p>
             <a:pPr algn="r"/>
             <a:r>
               <a:rPr lang="en-GB" sz="2800" dirty="0"/>
-              <a:t>− 0.86</a:t>
+              <a:t>− 0,86</a:t>
             </a:r>
           </a:p>
           <a:p>
             <a:pPr algn="r"/>
             <a:r>
               <a:rPr lang="en-GB" sz="2800" dirty="0"/>
-              <a:t>= 0.73</a:t>
+              <a:t>= 0,73</a:t>
             </a:r>
             <a:endParaRPr lang="en-GB" dirty="0"/>
           </a:p>
@@ -11002,21 +11002,21 @@
             <a:pPr algn="r"/>
             <a:r>
               <a:rPr lang="en-GB" sz="2800" dirty="0"/>
-              <a:t>8.54</a:t>
+              <a:t>8,54</a:t>
             </a:r>
           </a:p>
           <a:p>
             <a:pPr algn="r"/>
             <a:r>
               <a:rPr lang="en-GB" sz="2800" dirty="0"/>
-              <a:t>+ 0.63</a:t>
+              <a:t>+ 0,63</a:t>
             </a:r>
           </a:p>
           <a:p>
             <a:pPr algn="r"/>
             <a:r>
               <a:rPr lang="en-GB" sz="2800" dirty="0"/>
-              <a:t>= 9.17</a:t>
+              <a:t>= 9,17</a:t>
             </a:r>
             <a:endParaRPr lang="en-GB" dirty="0"/>
           </a:p>
@@ -11053,21 +11053,21 @@
             <a:pPr algn="r"/>
             <a:r>
               <a:rPr lang="en-GB" sz="2800" dirty="0"/>
-              <a:t>4.29</a:t>
+              <a:t>4,29</a:t>
             </a:r>
           </a:p>
           <a:p>
             <a:pPr algn="r"/>
             <a:r>
               <a:rPr lang="en-GB" sz="2800" dirty="0"/>
-              <a:t>− 0.58</a:t>
+              <a:t>− 0,58</a:t>
             </a:r>
           </a:p>
           <a:p>
             <a:pPr algn="r"/>
             <a:r>
               <a:rPr lang="en-GB" sz="2800" dirty="0"/>
-              <a:t>= 3.71</a:t>
+              <a:t>= 3,71</a:t>
             </a:r>
             <a:endParaRPr lang="en-GB" dirty="0"/>
           </a:p>
@@ -11104,21 +11104,21 @@
             <a:pPr algn="r"/>
             <a:r>
               <a:rPr lang="en-GB" sz="2800" dirty="0"/>
-              <a:t>7.12</a:t>
+              <a:t>7,12</a:t>
             </a:r>
           </a:p>
           <a:p>
             <a:pPr algn="r"/>
             <a:r>
               <a:rPr lang="en-GB" sz="2800" dirty="0"/>
-              <a:t>+ 0.93</a:t>
+              <a:t>+ 0,93</a:t>
             </a:r>
           </a:p>
           <a:p>
             <a:pPr algn="r"/>
             <a:r>
               <a:rPr lang="en-GB" sz="2800" dirty="0"/>
-              <a:t>= 8.05</a:t>
+              <a:t>= 8,05</a:t>
             </a:r>
             <a:endParaRPr lang="en-GB" dirty="0"/>
           </a:p>
@@ -11155,21 +11155,21 @@
             <a:pPr algn="r"/>
             <a:r>
               <a:rPr lang="en-GB" sz="2800" dirty="0"/>
-              <a:t>3.47</a:t>
+              <a:t>3,47</a:t>
             </a:r>
           </a:p>
           <a:p>
             <a:pPr algn="r"/>
             <a:r>
               <a:rPr lang="en-GB" sz="2800" dirty="0"/>
-              <a:t>− 0.56</a:t>
+              <a:t>− 0,56</a:t>
             </a:r>
           </a:p>
           <a:p>
             <a:pPr algn="r"/>
             <a:r>
               <a:rPr lang="en-GB" sz="2800" dirty="0"/>
-              <a:t>= 2.91</a:t>
+              <a:t>= 2,91</a:t>
             </a:r>
             <a:endParaRPr lang="en-GB" dirty="0"/>
           </a:p>
